--- a/Day 2 Part 4/D2P4.pptx
+++ b/Day 2 Part 4/D2P4.pptx
@@ -131,8 +131,7 @@
 <file path=ppt/revisionInfo.xml><?xml version="1.0" encoding="utf-8"?>
 <p1510:revInfo xmlns:a="http://schemas.openxmlformats.org/drawingml/2006/main" xmlns:r="http://schemas.openxmlformats.org/officeDocument/2006/relationships" xmlns:p1510="http://schemas.microsoft.com/office/powerpoint/2015/10/main">
   <p1510:revLst>
-    <p1510:client id="{51CDB8C4-6A3E-4C2C-83BC-F4A3F0031D55}" v="2" dt="2026-01-12T06:36:34.089"/>
-    <p1510:client id="{A8CE74B3-EFCA-4CD6-837E-610E2629ACE6}" v="1" dt="2026-01-12T06:57:48.004"/>
+    <p1510:client id="{AA9B6F2A-77E8-4275-9BD1-FC5DABBD9771}" v="1" dt="2026-03-23T13:11:00.060"/>
   </p1510:revLst>
 </p1510:revInfo>
 </file>
@@ -142,491 +141,24 @@
   <pc:docChgLst>
     <pc:chgData name="Matthieu De Mari" userId="dfb708c9-d8dc-439f-9a3b-c772bf4a311c" providerId="ADAL" clId="{81E9B007-0C2C-493E-9B93-55A62C9C1F12}"/>
     <pc:docChg chg="undo custSel addSld delSld modSld sldOrd delSection modSection">
-      <pc:chgData name="Matthieu De Mari" userId="dfb708c9-d8dc-439f-9a3b-c772bf4a311c" providerId="ADAL" clId="{81E9B007-0C2C-493E-9B93-55A62C9C1F12}" dt="2026-01-12T07:02:06.708" v="581" actId="1035"/>
+      <pc:chgData name="Matthieu De Mari" userId="dfb708c9-d8dc-439f-9a3b-c772bf4a311c" providerId="ADAL" clId="{81E9B007-0C2C-493E-9B93-55A62C9C1F12}" dt="2026-03-23T13:11:00.030" v="683" actId="20577"/>
       <pc:docMkLst>
         <pc:docMk/>
       </pc:docMkLst>
-      <pc:sldChg chg="del">
-        <pc:chgData name="Matthieu De Mari" userId="dfb708c9-d8dc-439f-9a3b-c772bf4a311c" providerId="ADAL" clId="{81E9B007-0C2C-493E-9B93-55A62C9C1F12}" dt="2026-01-12T06:36:23.782" v="49" actId="47"/>
-        <pc:sldMkLst>
-          <pc:docMk/>
-          <pc:sldMk cId="1036081419" sldId="346"/>
-        </pc:sldMkLst>
-      </pc:sldChg>
-      <pc:sldChg chg="modSp mod">
-        <pc:chgData name="Matthieu De Mari" userId="dfb708c9-d8dc-439f-9a3b-c772bf4a311c" providerId="ADAL" clId="{81E9B007-0C2C-493E-9B93-55A62C9C1F12}" dt="2026-01-12T06:57:24.259" v="175" actId="20577"/>
-        <pc:sldMkLst>
-          <pc:docMk/>
-          <pc:sldMk cId="1040156172" sldId="377"/>
-        </pc:sldMkLst>
-        <pc:spChg chg="mod">
-          <ac:chgData name="Matthieu De Mari" userId="dfb708c9-d8dc-439f-9a3b-c772bf4a311c" providerId="ADAL" clId="{81E9B007-0C2C-493E-9B93-55A62C9C1F12}" dt="2026-01-12T06:57:24.259" v="175" actId="20577"/>
-          <ac:spMkLst>
-            <pc:docMk/>
-            <pc:sldMk cId="1040156172" sldId="377"/>
-            <ac:spMk id="2" creationId="{080CEB46-CC16-4D19-8C2C-AEE9471D8168}"/>
-          </ac:spMkLst>
-        </pc:spChg>
-      </pc:sldChg>
-      <pc:sldChg chg="del ord">
-        <pc:chgData name="Matthieu De Mari" userId="dfb708c9-d8dc-439f-9a3b-c772bf4a311c" providerId="ADAL" clId="{81E9B007-0C2C-493E-9B93-55A62C9C1F12}" dt="2026-01-12T06:57:28.825" v="179" actId="47"/>
-        <pc:sldMkLst>
-          <pc:docMk/>
-          <pc:sldMk cId="3620399431" sldId="396"/>
-        </pc:sldMkLst>
-      </pc:sldChg>
-      <pc:sldChg chg="modSp del mod">
-        <pc:chgData name="Matthieu De Mari" userId="dfb708c9-d8dc-439f-9a3b-c772bf4a311c" providerId="ADAL" clId="{81E9B007-0C2C-493E-9B93-55A62C9C1F12}" dt="2026-01-12T06:57:27.039" v="177" actId="47"/>
-        <pc:sldMkLst>
-          <pc:docMk/>
-          <pc:sldMk cId="1451434589" sldId="397"/>
-        </pc:sldMkLst>
-        <pc:spChg chg="mod">
-          <ac:chgData name="Matthieu De Mari" userId="dfb708c9-d8dc-439f-9a3b-c772bf4a311c" providerId="ADAL" clId="{81E9B007-0C2C-493E-9B93-55A62C9C1F12}" dt="2026-01-12T06:33:11.727" v="42" actId="20577"/>
-          <ac:spMkLst>
-            <pc:docMk/>
-            <pc:sldMk cId="1451434589" sldId="397"/>
-            <ac:spMk id="3" creationId="{BA2A0416-0B18-CDD3-9A37-B441AE8FAEC0}"/>
-          </ac:spMkLst>
-        </pc:spChg>
-      </pc:sldChg>
-      <pc:sldChg chg="del">
-        <pc:chgData name="Matthieu De Mari" userId="dfb708c9-d8dc-439f-9a3b-c772bf4a311c" providerId="ADAL" clId="{81E9B007-0C2C-493E-9B93-55A62C9C1F12}" dt="2026-01-12T06:57:27.853" v="178" actId="47"/>
-        <pc:sldMkLst>
-          <pc:docMk/>
-          <pc:sldMk cId="2867637474" sldId="398"/>
-        </pc:sldMkLst>
-      </pc:sldChg>
-      <pc:sldChg chg="del">
-        <pc:chgData name="Matthieu De Mari" userId="dfb708c9-d8dc-439f-9a3b-c772bf4a311c" providerId="ADAL" clId="{81E9B007-0C2C-493E-9B93-55A62C9C1F12}" dt="2026-01-12T06:57:28.825" v="179" actId="47"/>
-        <pc:sldMkLst>
-          <pc:docMk/>
-          <pc:sldMk cId="122423608" sldId="399"/>
-        </pc:sldMkLst>
-      </pc:sldChg>
-      <pc:sldChg chg="del">
-        <pc:chgData name="Matthieu De Mari" userId="dfb708c9-d8dc-439f-9a3b-c772bf4a311c" providerId="ADAL" clId="{81E9B007-0C2C-493E-9B93-55A62C9C1F12}" dt="2026-01-12T06:57:31.407" v="182" actId="47"/>
-        <pc:sldMkLst>
-          <pc:docMk/>
-          <pc:sldMk cId="4039171501" sldId="401"/>
-        </pc:sldMkLst>
-      </pc:sldChg>
-      <pc:sldChg chg="del">
-        <pc:chgData name="Matthieu De Mari" userId="dfb708c9-d8dc-439f-9a3b-c772bf4a311c" providerId="ADAL" clId="{81E9B007-0C2C-493E-9B93-55A62C9C1F12}" dt="2026-01-12T06:57:30.706" v="181" actId="47"/>
-        <pc:sldMkLst>
-          <pc:docMk/>
-          <pc:sldMk cId="3163596145" sldId="402"/>
-        </pc:sldMkLst>
-      </pc:sldChg>
       <pc:sldChg chg="modSp add mod modClrScheme chgLayout">
-        <pc:chgData name="Matthieu De Mari" userId="dfb708c9-d8dc-439f-9a3b-c772bf4a311c" providerId="ADAL" clId="{81E9B007-0C2C-493E-9B93-55A62C9C1F12}" dt="2026-01-12T06:59:11.985" v="502" actId="113"/>
+        <pc:chgData name="Matthieu De Mari" userId="dfb708c9-d8dc-439f-9a3b-c772bf4a311c" providerId="ADAL" clId="{81E9B007-0C2C-493E-9B93-55A62C9C1F12}" dt="2026-03-23T13:11:00.030" v="683" actId="20577"/>
         <pc:sldMkLst>
           <pc:docMk/>
           <pc:sldMk cId="2100063369" sldId="598"/>
         </pc:sldMkLst>
         <pc:spChg chg="mod ord">
-          <ac:chgData name="Matthieu De Mari" userId="dfb708c9-d8dc-439f-9a3b-c772bf4a311c" providerId="ADAL" clId="{81E9B007-0C2C-493E-9B93-55A62C9C1F12}" dt="2026-01-12T06:58:04.807" v="209" actId="700"/>
-          <ac:spMkLst>
-            <pc:docMk/>
-            <pc:sldMk cId="2100063369" sldId="598"/>
-            <ac:spMk id="2" creationId="{B511B8E6-E8AC-E2AA-8587-37211257C3EA}"/>
-          </ac:spMkLst>
-        </pc:spChg>
-        <pc:spChg chg="mod ord">
-          <ac:chgData name="Matthieu De Mari" userId="dfb708c9-d8dc-439f-9a3b-c772bf4a311c" providerId="ADAL" clId="{81E9B007-0C2C-493E-9B93-55A62C9C1F12}" dt="2026-01-12T06:59:11.985" v="502" actId="113"/>
+          <ac:chgData name="Matthieu De Mari" userId="dfb708c9-d8dc-439f-9a3b-c772bf4a311c" providerId="ADAL" clId="{81E9B007-0C2C-493E-9B93-55A62C9C1F12}" dt="2026-03-23T13:11:00.030" v="683" actId="20577"/>
           <ac:spMkLst>
             <pc:docMk/>
             <pc:sldMk cId="2100063369" sldId="598"/>
             <ac:spMk id="3" creationId="{0AF75346-FFC2-1F4C-D9E7-43CE81DA4C3C}"/>
           </ac:spMkLst>
         </pc:spChg>
-      </pc:sldChg>
-      <pc:sldChg chg="addSp delSp modSp new mod">
-        <pc:chgData name="Matthieu De Mari" userId="dfb708c9-d8dc-439f-9a3b-c772bf4a311c" providerId="ADAL" clId="{81E9B007-0C2C-493E-9B93-55A62C9C1F12}" dt="2026-01-12T07:02:06.708" v="581" actId="1035"/>
-        <pc:sldMkLst>
-          <pc:docMk/>
-          <pc:sldMk cId="1695927276" sldId="599"/>
-        </pc:sldMkLst>
-        <pc:spChg chg="mod">
-          <ac:chgData name="Matthieu De Mari" userId="dfb708c9-d8dc-439f-9a3b-c772bf4a311c" providerId="ADAL" clId="{81E9B007-0C2C-493E-9B93-55A62C9C1F12}" dt="2026-01-12T07:02:06.708" v="581" actId="1035"/>
-          <ac:spMkLst>
-            <pc:docMk/>
-            <pc:sldMk cId="1695927276" sldId="599"/>
-            <ac:spMk id="2" creationId="{1BBDE908-17A7-B813-4910-ACA86AA1884C}"/>
-          </ac:spMkLst>
-        </pc:spChg>
-        <pc:spChg chg="del">
-          <ac:chgData name="Matthieu De Mari" userId="dfb708c9-d8dc-439f-9a3b-c772bf4a311c" providerId="ADAL" clId="{81E9B007-0C2C-493E-9B93-55A62C9C1F12}" dt="2026-01-12T06:59:26.897" v="504" actId="478"/>
-          <ac:spMkLst>
-            <pc:docMk/>
-            <pc:sldMk cId="1695927276" sldId="599"/>
-            <ac:spMk id="3" creationId="{058FA32A-C175-FB6D-09D0-1337149F4A5E}"/>
-          </ac:spMkLst>
-        </pc:spChg>
-        <pc:picChg chg="add mod modCrop">
-          <ac:chgData name="Matthieu De Mari" userId="dfb708c9-d8dc-439f-9a3b-c772bf4a311c" providerId="ADAL" clId="{81E9B007-0C2C-493E-9B93-55A62C9C1F12}" dt="2026-01-12T07:01:47.058" v="562" actId="732"/>
-          <ac:picMkLst>
-            <pc:docMk/>
-            <pc:sldMk cId="1695927276" sldId="599"/>
-            <ac:picMk id="5" creationId="{4700E6F8-4ACD-DF81-DFC1-2418830AF379}"/>
-          </ac:picMkLst>
-        </pc:picChg>
-        <pc:picChg chg="add mod modCrop">
-          <ac:chgData name="Matthieu De Mari" userId="dfb708c9-d8dc-439f-9a3b-c772bf4a311c" providerId="ADAL" clId="{81E9B007-0C2C-493E-9B93-55A62C9C1F12}" dt="2026-01-12T07:01:57.673" v="566" actId="14100"/>
-          <ac:picMkLst>
-            <pc:docMk/>
-            <pc:sldMk cId="1695927276" sldId="599"/>
-            <ac:picMk id="7" creationId="{7971CC44-4CC3-A712-456B-79D1124AD4D4}"/>
-          </ac:picMkLst>
-        </pc:picChg>
-      </pc:sldChg>
-      <pc:sldChg chg="del">
-        <pc:chgData name="Matthieu De Mari" userId="dfb708c9-d8dc-439f-9a3b-c772bf4a311c" providerId="ADAL" clId="{81E9B007-0C2C-493E-9B93-55A62C9C1F12}" dt="2026-01-12T06:57:26.270" v="176" actId="47"/>
-        <pc:sldMkLst>
-          <pc:docMk/>
-          <pc:sldMk cId="3029045816" sldId="781"/>
-        </pc:sldMkLst>
-      </pc:sldChg>
-      <pc:sldChg chg="del">
-        <pc:chgData name="Matthieu De Mari" userId="dfb708c9-d8dc-439f-9a3b-c772bf4a311c" providerId="ADAL" clId="{81E9B007-0C2C-493E-9B93-55A62C9C1F12}" dt="2026-01-12T06:32:56.390" v="34" actId="47"/>
-        <pc:sldMkLst>
-          <pc:docMk/>
-          <pc:sldMk cId="278531271" sldId="782"/>
-        </pc:sldMkLst>
-      </pc:sldChg>
-      <pc:sldChg chg="del">
-        <pc:chgData name="Matthieu De Mari" userId="dfb708c9-d8dc-439f-9a3b-c772bf4a311c" providerId="ADAL" clId="{81E9B007-0C2C-493E-9B93-55A62C9C1F12}" dt="2026-01-12T06:32:44.984" v="30" actId="47"/>
-        <pc:sldMkLst>
-          <pc:docMk/>
-          <pc:sldMk cId="1783907351" sldId="783"/>
-        </pc:sldMkLst>
-      </pc:sldChg>
-      <pc:sldChg chg="del">
-        <pc:chgData name="Matthieu De Mari" userId="dfb708c9-d8dc-439f-9a3b-c772bf4a311c" providerId="ADAL" clId="{81E9B007-0C2C-493E-9B93-55A62C9C1F12}" dt="2026-01-12T06:32:45.607" v="31" actId="47"/>
-        <pc:sldMkLst>
-          <pc:docMk/>
-          <pc:sldMk cId="2670805330" sldId="784"/>
-        </pc:sldMkLst>
-      </pc:sldChg>
-      <pc:sldChg chg="modSp del mod">
-        <pc:chgData name="Matthieu De Mari" userId="dfb708c9-d8dc-439f-9a3b-c772bf4a311c" providerId="ADAL" clId="{81E9B007-0C2C-493E-9B93-55A62C9C1F12}" dt="2026-01-12T06:57:26.270" v="176" actId="47"/>
-        <pc:sldMkLst>
-          <pc:docMk/>
-          <pc:sldMk cId="636279122" sldId="785"/>
-        </pc:sldMkLst>
-        <pc:spChg chg="mod">
-          <ac:chgData name="Matthieu De Mari" userId="dfb708c9-d8dc-439f-9a3b-c772bf4a311c" providerId="ADAL" clId="{81E9B007-0C2C-493E-9B93-55A62C9C1F12}" dt="2026-01-12T06:32:43.204" v="29" actId="20577"/>
-          <ac:spMkLst>
-            <pc:docMk/>
-            <pc:sldMk cId="636279122" sldId="785"/>
-            <ac:spMk id="2" creationId="{3F88AB3E-DF60-4411-7415-7A8708334829}"/>
-          </ac:spMkLst>
-        </pc:spChg>
-        <pc:spChg chg="mod">
-          <ac:chgData name="Matthieu De Mari" userId="dfb708c9-d8dc-439f-9a3b-c772bf4a311c" providerId="ADAL" clId="{81E9B007-0C2C-493E-9B93-55A62C9C1F12}" dt="2026-01-12T06:32:49.211" v="33" actId="12"/>
-          <ac:spMkLst>
-            <pc:docMk/>
-            <pc:sldMk cId="636279122" sldId="785"/>
-            <ac:spMk id="3" creationId="{65B58308-C101-BC04-E972-00C74DE5080B}"/>
-          </ac:spMkLst>
-        </pc:spChg>
-      </pc:sldChg>
-      <pc:sldChg chg="del">
-        <pc:chgData name="Matthieu De Mari" userId="dfb708c9-d8dc-439f-9a3b-c772bf4a311c" providerId="ADAL" clId="{81E9B007-0C2C-493E-9B93-55A62C9C1F12}" dt="2026-01-12T06:57:27.039" v="177" actId="47"/>
-        <pc:sldMkLst>
-          <pc:docMk/>
-          <pc:sldMk cId="473408429" sldId="789"/>
-        </pc:sldMkLst>
-      </pc:sldChg>
-      <pc:sldChg chg="del">
-        <pc:chgData name="Matthieu De Mari" userId="dfb708c9-d8dc-439f-9a3b-c772bf4a311c" providerId="ADAL" clId="{81E9B007-0C2C-493E-9B93-55A62C9C1F12}" dt="2026-01-12T06:57:27.039" v="177" actId="47"/>
-        <pc:sldMkLst>
-          <pc:docMk/>
-          <pc:sldMk cId="592329134" sldId="790"/>
-        </pc:sldMkLst>
-      </pc:sldChg>
-      <pc:sldChg chg="del">
-        <pc:chgData name="Matthieu De Mari" userId="dfb708c9-d8dc-439f-9a3b-c772bf4a311c" providerId="ADAL" clId="{81E9B007-0C2C-493E-9B93-55A62C9C1F12}" dt="2026-01-12T06:57:27.039" v="177" actId="47"/>
-        <pc:sldMkLst>
-          <pc:docMk/>
-          <pc:sldMk cId="2530178653" sldId="791"/>
-        </pc:sldMkLst>
-      </pc:sldChg>
-      <pc:sldChg chg="modSp del mod">
-        <pc:chgData name="Matthieu De Mari" userId="dfb708c9-d8dc-439f-9a3b-c772bf4a311c" providerId="ADAL" clId="{81E9B007-0C2C-493E-9B93-55A62C9C1F12}" dt="2026-01-12T06:57:27.039" v="177" actId="47"/>
-        <pc:sldMkLst>
-          <pc:docMk/>
-          <pc:sldMk cId="2330822039" sldId="792"/>
-        </pc:sldMkLst>
-        <pc:spChg chg="mod">
-          <ac:chgData name="Matthieu De Mari" userId="dfb708c9-d8dc-439f-9a3b-c772bf4a311c" providerId="ADAL" clId="{81E9B007-0C2C-493E-9B93-55A62C9C1F12}" dt="2026-01-12T06:33:32.420" v="43" actId="14100"/>
-          <ac:spMkLst>
-            <pc:docMk/>
-            <pc:sldMk cId="2330822039" sldId="792"/>
-            <ac:spMk id="3" creationId="{BA2A0416-0B18-CDD3-9A37-B441AE8FAEC0}"/>
-          </ac:spMkLst>
-        </pc:spChg>
-      </pc:sldChg>
-      <pc:sldChg chg="del">
-        <pc:chgData name="Matthieu De Mari" userId="dfb708c9-d8dc-439f-9a3b-c772bf4a311c" providerId="ADAL" clId="{81E9B007-0C2C-493E-9B93-55A62C9C1F12}" dt="2026-01-12T06:57:27.039" v="177" actId="47"/>
-        <pc:sldMkLst>
-          <pc:docMk/>
-          <pc:sldMk cId="260742946" sldId="793"/>
-        </pc:sldMkLst>
-      </pc:sldChg>
-      <pc:sldChg chg="del">
-        <pc:chgData name="Matthieu De Mari" userId="dfb708c9-d8dc-439f-9a3b-c772bf4a311c" providerId="ADAL" clId="{81E9B007-0C2C-493E-9B93-55A62C9C1F12}" dt="2026-01-12T06:57:27.039" v="177" actId="47"/>
-        <pc:sldMkLst>
-          <pc:docMk/>
-          <pc:sldMk cId="1577144882" sldId="794"/>
-        </pc:sldMkLst>
-      </pc:sldChg>
-      <pc:sldChg chg="del">
-        <pc:chgData name="Matthieu De Mari" userId="dfb708c9-d8dc-439f-9a3b-c772bf4a311c" providerId="ADAL" clId="{81E9B007-0C2C-493E-9B93-55A62C9C1F12}" dt="2026-01-12T06:57:27.853" v="178" actId="47"/>
-        <pc:sldMkLst>
-          <pc:docMk/>
-          <pc:sldMk cId="2353942002" sldId="795"/>
-        </pc:sldMkLst>
-      </pc:sldChg>
-      <pc:sldChg chg="del">
-        <pc:chgData name="Matthieu De Mari" userId="dfb708c9-d8dc-439f-9a3b-c772bf4a311c" providerId="ADAL" clId="{81E9B007-0C2C-493E-9B93-55A62C9C1F12}" dt="2026-01-12T06:57:27.853" v="178" actId="47"/>
-        <pc:sldMkLst>
-          <pc:docMk/>
-          <pc:sldMk cId="1414932605" sldId="796"/>
-        </pc:sldMkLst>
-      </pc:sldChg>
-      <pc:sldChg chg="del">
-        <pc:chgData name="Matthieu De Mari" userId="dfb708c9-d8dc-439f-9a3b-c772bf4a311c" providerId="ADAL" clId="{81E9B007-0C2C-493E-9B93-55A62C9C1F12}" dt="2026-01-12T06:57:28.825" v="179" actId="47"/>
-        <pc:sldMkLst>
-          <pc:docMk/>
-          <pc:sldMk cId="326589634" sldId="797"/>
-        </pc:sldMkLst>
-      </pc:sldChg>
-      <pc:sldChg chg="del">
-        <pc:chgData name="Matthieu De Mari" userId="dfb708c9-d8dc-439f-9a3b-c772bf4a311c" providerId="ADAL" clId="{81E9B007-0C2C-493E-9B93-55A62C9C1F12}" dt="2026-01-12T06:57:28.825" v="179" actId="47"/>
-        <pc:sldMkLst>
-          <pc:docMk/>
-          <pc:sldMk cId="567883404" sldId="798"/>
-        </pc:sldMkLst>
-      </pc:sldChg>
-      <pc:sldChg chg="del">
-        <pc:chgData name="Matthieu De Mari" userId="dfb708c9-d8dc-439f-9a3b-c772bf4a311c" providerId="ADAL" clId="{81E9B007-0C2C-493E-9B93-55A62C9C1F12}" dt="2026-01-12T06:57:28.825" v="179" actId="47"/>
-        <pc:sldMkLst>
-          <pc:docMk/>
-          <pc:sldMk cId="703353227" sldId="799"/>
-        </pc:sldMkLst>
-      </pc:sldChg>
-      <pc:sldChg chg="del">
-        <pc:chgData name="Matthieu De Mari" userId="dfb708c9-d8dc-439f-9a3b-c772bf4a311c" providerId="ADAL" clId="{81E9B007-0C2C-493E-9B93-55A62C9C1F12}" dt="2026-01-12T06:57:28.825" v="179" actId="47"/>
-        <pc:sldMkLst>
-          <pc:docMk/>
-          <pc:sldMk cId="51924387" sldId="801"/>
-        </pc:sldMkLst>
-      </pc:sldChg>
-      <pc:sldChg chg="del">
-        <pc:chgData name="Matthieu De Mari" userId="dfb708c9-d8dc-439f-9a3b-c772bf4a311c" providerId="ADAL" clId="{81E9B007-0C2C-493E-9B93-55A62C9C1F12}" dt="2026-01-12T06:57:28.825" v="179" actId="47"/>
-        <pc:sldMkLst>
-          <pc:docMk/>
-          <pc:sldMk cId="253262496" sldId="802"/>
-        </pc:sldMkLst>
-      </pc:sldChg>
-      <pc:sldChg chg="del">
-        <pc:chgData name="Matthieu De Mari" userId="dfb708c9-d8dc-439f-9a3b-c772bf4a311c" providerId="ADAL" clId="{81E9B007-0C2C-493E-9B93-55A62C9C1F12}" dt="2026-01-12T06:57:29.789" v="180" actId="47"/>
-        <pc:sldMkLst>
-          <pc:docMk/>
-          <pc:sldMk cId="232544569" sldId="803"/>
-        </pc:sldMkLst>
-      </pc:sldChg>
-      <pc:sldChg chg="del">
-        <pc:chgData name="Matthieu De Mari" userId="dfb708c9-d8dc-439f-9a3b-c772bf4a311c" providerId="ADAL" clId="{81E9B007-0C2C-493E-9B93-55A62C9C1F12}" dt="2026-01-12T06:57:28.825" v="179" actId="47"/>
-        <pc:sldMkLst>
-          <pc:docMk/>
-          <pc:sldMk cId="165715628" sldId="804"/>
-        </pc:sldMkLst>
-      </pc:sldChg>
-      <pc:sldChg chg="del">
-        <pc:chgData name="Matthieu De Mari" userId="dfb708c9-d8dc-439f-9a3b-c772bf4a311c" providerId="ADAL" clId="{81E9B007-0C2C-493E-9B93-55A62C9C1F12}" dt="2026-01-12T06:57:28.825" v="179" actId="47"/>
-        <pc:sldMkLst>
-          <pc:docMk/>
-          <pc:sldMk cId="1145967515" sldId="805"/>
-        </pc:sldMkLst>
-      </pc:sldChg>
-      <pc:sldChg chg="del">
-        <pc:chgData name="Matthieu De Mari" userId="dfb708c9-d8dc-439f-9a3b-c772bf4a311c" providerId="ADAL" clId="{81E9B007-0C2C-493E-9B93-55A62C9C1F12}" dt="2026-01-12T06:57:29.789" v="180" actId="47"/>
-        <pc:sldMkLst>
-          <pc:docMk/>
-          <pc:sldMk cId="3590245027" sldId="806"/>
-        </pc:sldMkLst>
-      </pc:sldChg>
-      <pc:sldChg chg="del">
-        <pc:chgData name="Matthieu De Mari" userId="dfb708c9-d8dc-439f-9a3b-c772bf4a311c" providerId="ADAL" clId="{81E9B007-0C2C-493E-9B93-55A62C9C1F12}" dt="2026-01-12T06:57:29.789" v="180" actId="47"/>
-        <pc:sldMkLst>
-          <pc:docMk/>
-          <pc:sldMk cId="609329699" sldId="807"/>
-        </pc:sldMkLst>
-      </pc:sldChg>
-      <pc:sldChg chg="del">
-        <pc:chgData name="Matthieu De Mari" userId="dfb708c9-d8dc-439f-9a3b-c772bf4a311c" providerId="ADAL" clId="{81E9B007-0C2C-493E-9B93-55A62C9C1F12}" dt="2026-01-12T06:57:29.789" v="180" actId="47"/>
-        <pc:sldMkLst>
-          <pc:docMk/>
-          <pc:sldMk cId="4127253414" sldId="809"/>
-        </pc:sldMkLst>
-      </pc:sldChg>
-      <pc:sldChg chg="del">
-        <pc:chgData name="Matthieu De Mari" userId="dfb708c9-d8dc-439f-9a3b-c772bf4a311c" providerId="ADAL" clId="{81E9B007-0C2C-493E-9B93-55A62C9C1F12}" dt="2026-01-12T06:57:29.789" v="180" actId="47"/>
-        <pc:sldMkLst>
-          <pc:docMk/>
-          <pc:sldMk cId="3415879044" sldId="810"/>
-        </pc:sldMkLst>
-      </pc:sldChg>
-      <pc:sldChg chg="del">
-        <pc:chgData name="Matthieu De Mari" userId="dfb708c9-d8dc-439f-9a3b-c772bf4a311c" providerId="ADAL" clId="{81E9B007-0C2C-493E-9B93-55A62C9C1F12}" dt="2026-01-12T06:57:29.789" v="180" actId="47"/>
-        <pc:sldMkLst>
-          <pc:docMk/>
-          <pc:sldMk cId="2804082923" sldId="811"/>
-        </pc:sldMkLst>
-      </pc:sldChg>
-      <pc:sldChg chg="del">
-        <pc:chgData name="Matthieu De Mari" userId="dfb708c9-d8dc-439f-9a3b-c772bf4a311c" providerId="ADAL" clId="{81E9B007-0C2C-493E-9B93-55A62C9C1F12}" dt="2026-01-12T06:57:30.706" v="181" actId="47"/>
-        <pc:sldMkLst>
-          <pc:docMk/>
-          <pc:sldMk cId="3931571633" sldId="812"/>
-        </pc:sldMkLst>
-      </pc:sldChg>
-      <pc:sldChg chg="del">
-        <pc:chgData name="Matthieu De Mari" userId="dfb708c9-d8dc-439f-9a3b-c772bf4a311c" providerId="ADAL" clId="{81E9B007-0C2C-493E-9B93-55A62C9C1F12}" dt="2026-01-12T06:57:30.706" v="181" actId="47"/>
-        <pc:sldMkLst>
-          <pc:docMk/>
-          <pc:sldMk cId="1677488890" sldId="813"/>
-        </pc:sldMkLst>
-      </pc:sldChg>
-      <pc:sldChg chg="add del">
-        <pc:chgData name="Matthieu De Mari" userId="dfb708c9-d8dc-439f-9a3b-c772bf4a311c" providerId="ADAL" clId="{81E9B007-0C2C-493E-9B93-55A62C9C1F12}" dt="2026-01-12T06:57:30.706" v="181" actId="47"/>
-        <pc:sldMkLst>
-          <pc:docMk/>
-          <pc:sldMk cId="2163984957" sldId="814"/>
-        </pc:sldMkLst>
-      </pc:sldChg>
-      <pc:sldChg chg="del">
-        <pc:chgData name="Matthieu De Mari" userId="dfb708c9-d8dc-439f-9a3b-c772bf4a311c" providerId="ADAL" clId="{81E9B007-0C2C-493E-9B93-55A62C9C1F12}" dt="2026-01-12T06:57:30.706" v="181" actId="47"/>
-        <pc:sldMkLst>
-          <pc:docMk/>
-          <pc:sldMk cId="507741553" sldId="815"/>
-        </pc:sldMkLst>
-      </pc:sldChg>
-      <pc:sldChg chg="del">
-        <pc:chgData name="Matthieu De Mari" userId="dfb708c9-d8dc-439f-9a3b-c772bf4a311c" providerId="ADAL" clId="{81E9B007-0C2C-493E-9B93-55A62C9C1F12}" dt="2026-01-12T06:57:31.407" v="182" actId="47"/>
-        <pc:sldMkLst>
-          <pc:docMk/>
-          <pc:sldMk cId="1946753280" sldId="816"/>
-        </pc:sldMkLst>
-      </pc:sldChg>
-      <pc:sldChg chg="del">
-        <pc:chgData name="Matthieu De Mari" userId="dfb708c9-d8dc-439f-9a3b-c772bf4a311c" providerId="ADAL" clId="{81E9B007-0C2C-493E-9B93-55A62C9C1F12}" dt="2026-01-12T06:57:31.407" v="182" actId="47"/>
-        <pc:sldMkLst>
-          <pc:docMk/>
-          <pc:sldMk cId="4233116706" sldId="817"/>
-        </pc:sldMkLst>
-      </pc:sldChg>
-      <pc:sldChg chg="del">
-        <pc:chgData name="Matthieu De Mari" userId="dfb708c9-d8dc-439f-9a3b-c772bf4a311c" providerId="ADAL" clId="{81E9B007-0C2C-493E-9B93-55A62C9C1F12}" dt="2026-01-12T06:57:31.407" v="182" actId="47"/>
-        <pc:sldMkLst>
-          <pc:docMk/>
-          <pc:sldMk cId="182983479" sldId="818"/>
-        </pc:sldMkLst>
-      </pc:sldChg>
-      <pc:sldChg chg="del">
-        <pc:chgData name="Matthieu De Mari" userId="dfb708c9-d8dc-439f-9a3b-c772bf4a311c" providerId="ADAL" clId="{81E9B007-0C2C-493E-9B93-55A62C9C1F12}" dt="2026-01-12T06:57:32.163" v="183" actId="47"/>
-        <pc:sldMkLst>
-          <pc:docMk/>
-          <pc:sldMk cId="651859086" sldId="820"/>
-        </pc:sldMkLst>
-      </pc:sldChg>
-      <pc:sldChg chg="del">
-        <pc:chgData name="Matthieu De Mari" userId="dfb708c9-d8dc-439f-9a3b-c772bf4a311c" providerId="ADAL" clId="{81E9B007-0C2C-493E-9B93-55A62C9C1F12}" dt="2026-01-12T06:57:32.163" v="183" actId="47"/>
-        <pc:sldMkLst>
-          <pc:docMk/>
-          <pc:sldMk cId="986128993" sldId="821"/>
-        </pc:sldMkLst>
-      </pc:sldChg>
-      <pc:sldChg chg="del">
-        <pc:chgData name="Matthieu De Mari" userId="dfb708c9-d8dc-439f-9a3b-c772bf4a311c" providerId="ADAL" clId="{81E9B007-0C2C-493E-9B93-55A62C9C1F12}" dt="2026-01-12T06:57:32.163" v="183" actId="47"/>
-        <pc:sldMkLst>
-          <pc:docMk/>
-          <pc:sldMk cId="4216078664" sldId="822"/>
-        </pc:sldMkLst>
-      </pc:sldChg>
-      <pc:sldChg chg="modSp add del mod">
-        <pc:chgData name="Matthieu De Mari" userId="dfb708c9-d8dc-439f-9a3b-c772bf4a311c" providerId="ADAL" clId="{81E9B007-0C2C-493E-9B93-55A62C9C1F12}" dt="2026-01-12T06:57:32.163" v="183" actId="47"/>
-        <pc:sldMkLst>
-          <pc:docMk/>
-          <pc:sldMk cId="3100375267" sldId="826"/>
-        </pc:sldMkLst>
-        <pc:spChg chg="mod">
-          <ac:chgData name="Matthieu De Mari" userId="dfb708c9-d8dc-439f-9a3b-c772bf4a311c" providerId="ADAL" clId="{81E9B007-0C2C-493E-9B93-55A62C9C1F12}" dt="2026-01-12T06:36:47.476" v="78" actId="5793"/>
-          <ac:spMkLst>
-            <pc:docMk/>
-            <pc:sldMk cId="3100375267" sldId="826"/>
-            <ac:spMk id="5" creationId="{7ACD5660-3AA0-1773-354B-1B2326A4442B}"/>
-          </ac:spMkLst>
-        </pc:spChg>
-        <pc:spChg chg="mod">
-          <ac:chgData name="Matthieu De Mari" userId="dfb708c9-d8dc-439f-9a3b-c772bf4a311c" providerId="ADAL" clId="{81E9B007-0C2C-493E-9B93-55A62C9C1F12}" dt="2026-01-12T06:37:15.304" v="173" actId="20577"/>
-          <ac:spMkLst>
-            <pc:docMk/>
-            <pc:sldMk cId="3100375267" sldId="826"/>
-            <ac:spMk id="6" creationId="{809CF8BE-879B-5BE7-5756-1FE0DC7D50D5}"/>
-          </ac:spMkLst>
-        </pc:spChg>
-      </pc:sldChg>
-      <pc:sldChg chg="del">
-        <pc:chgData name="Matthieu De Mari" userId="dfb708c9-d8dc-439f-9a3b-c772bf4a311c" providerId="ADAL" clId="{81E9B007-0C2C-493E-9B93-55A62C9C1F12}" dt="2026-01-12T06:57:28.825" v="179" actId="47"/>
-        <pc:sldMkLst>
-          <pc:docMk/>
-          <pc:sldMk cId="386474252" sldId="827"/>
-        </pc:sldMkLst>
-      </pc:sldChg>
-      <pc:sldChg chg="del">
-        <pc:chgData name="Matthieu De Mari" userId="dfb708c9-d8dc-439f-9a3b-c772bf4a311c" providerId="ADAL" clId="{81E9B007-0C2C-493E-9B93-55A62C9C1F12}" dt="2026-01-12T06:57:30.706" v="181" actId="47"/>
-        <pc:sldMkLst>
-          <pc:docMk/>
-          <pc:sldMk cId="2986862345" sldId="828"/>
-        </pc:sldMkLst>
-      </pc:sldChg>
-      <pc:sldChg chg="del">
-        <pc:chgData name="Matthieu De Mari" userId="dfb708c9-d8dc-439f-9a3b-c772bf4a311c" providerId="ADAL" clId="{81E9B007-0C2C-493E-9B93-55A62C9C1F12}" dt="2026-01-12T06:57:31.407" v="182" actId="47"/>
-        <pc:sldMkLst>
-          <pc:docMk/>
-          <pc:sldMk cId="2441798468" sldId="829"/>
-        </pc:sldMkLst>
-      </pc:sldChg>
-      <pc:sldChg chg="del">
-        <pc:chgData name="Matthieu De Mari" userId="dfb708c9-d8dc-439f-9a3b-c772bf4a311c" providerId="ADAL" clId="{81E9B007-0C2C-493E-9B93-55A62C9C1F12}" dt="2026-01-12T06:57:31.407" v="182" actId="47"/>
-        <pc:sldMkLst>
-          <pc:docMk/>
-          <pc:sldMk cId="491711875" sldId="830"/>
-        </pc:sldMkLst>
-      </pc:sldChg>
-      <pc:sldChg chg="del">
-        <pc:chgData name="Matthieu De Mari" userId="dfb708c9-d8dc-439f-9a3b-c772bf4a311c" providerId="ADAL" clId="{81E9B007-0C2C-493E-9B93-55A62C9C1F12}" dt="2026-01-12T06:57:28.825" v="179" actId="47"/>
-        <pc:sldMkLst>
-          <pc:docMk/>
-          <pc:sldMk cId="124198755" sldId="831"/>
-        </pc:sldMkLst>
-      </pc:sldChg>
-      <pc:sldChg chg="del">
-        <pc:chgData name="Matthieu De Mari" userId="dfb708c9-d8dc-439f-9a3b-c772bf4a311c" providerId="ADAL" clId="{81E9B007-0C2C-493E-9B93-55A62C9C1F12}" dt="2026-01-12T06:57:29.789" v="180" actId="47"/>
-        <pc:sldMkLst>
-          <pc:docMk/>
-          <pc:sldMk cId="1710209134" sldId="832"/>
-        </pc:sldMkLst>
-      </pc:sldChg>
-      <pc:sldChg chg="del">
-        <pc:chgData name="Matthieu De Mari" userId="dfb708c9-d8dc-439f-9a3b-c772bf4a311c" providerId="ADAL" clId="{81E9B007-0C2C-493E-9B93-55A62C9C1F12}" dt="2026-01-12T06:57:29.789" v="180" actId="47"/>
-        <pc:sldMkLst>
-          <pc:docMk/>
-          <pc:sldMk cId="3288933084" sldId="833"/>
-        </pc:sldMkLst>
       </pc:sldChg>
     </pc:docChg>
   </pc:docChgLst>
@@ -715,7 +247,7 @@
           <a:p>
             <a:fld id="{61478373-EB31-4867-8CF0-FA31364748A5}" type="datetimeFigureOut">
               <a:rPr lang="en-GB" smtClean="0"/>
-              <a:t>12/01/2026</a:t>
+              <a:t>23/03/2026</a:t>
             </a:fld>
             <a:endParaRPr lang="en-GB"/>
           </a:p>
@@ -1132,7 +664,7 @@
           <a:p>
             <a:fld id="{E85DF616-B21E-4EF6-A6A5-95E2FB3EB1A1}" type="datetimeFigureOut">
               <a:rPr lang="en-GB" smtClean="0"/>
-              <a:t>12/01/2026</a:t>
+              <a:t>23/03/2026</a:t>
             </a:fld>
             <a:endParaRPr lang="en-GB"/>
           </a:p>
@@ -1332,7 +864,7 @@
           <a:p>
             <a:fld id="{E85DF616-B21E-4EF6-A6A5-95E2FB3EB1A1}" type="datetimeFigureOut">
               <a:rPr lang="en-GB" smtClean="0"/>
-              <a:t>12/01/2026</a:t>
+              <a:t>23/03/2026</a:t>
             </a:fld>
             <a:endParaRPr lang="en-GB"/>
           </a:p>
@@ -1542,7 +1074,7 @@
           <a:p>
             <a:fld id="{E85DF616-B21E-4EF6-A6A5-95E2FB3EB1A1}" type="datetimeFigureOut">
               <a:rPr lang="en-GB" smtClean="0"/>
-              <a:t>12/01/2026</a:t>
+              <a:t>23/03/2026</a:t>
             </a:fld>
             <a:endParaRPr lang="en-GB"/>
           </a:p>
@@ -1742,7 +1274,7 @@
           <a:p>
             <a:fld id="{E85DF616-B21E-4EF6-A6A5-95E2FB3EB1A1}" type="datetimeFigureOut">
               <a:rPr lang="en-GB" smtClean="0"/>
-              <a:t>12/01/2026</a:t>
+              <a:t>23/03/2026</a:t>
             </a:fld>
             <a:endParaRPr lang="en-GB"/>
           </a:p>
@@ -2018,7 +1550,7 @@
           <a:p>
             <a:fld id="{E85DF616-B21E-4EF6-A6A5-95E2FB3EB1A1}" type="datetimeFigureOut">
               <a:rPr lang="en-GB" smtClean="0"/>
-              <a:t>12/01/2026</a:t>
+              <a:t>23/03/2026</a:t>
             </a:fld>
             <a:endParaRPr lang="en-GB"/>
           </a:p>
@@ -2286,7 +1818,7 @@
           <a:p>
             <a:fld id="{E85DF616-B21E-4EF6-A6A5-95E2FB3EB1A1}" type="datetimeFigureOut">
               <a:rPr lang="en-GB" smtClean="0"/>
-              <a:t>12/01/2026</a:t>
+              <a:t>23/03/2026</a:t>
             </a:fld>
             <a:endParaRPr lang="en-GB"/>
           </a:p>
@@ -2701,7 +2233,7 @@
           <a:p>
             <a:fld id="{E85DF616-B21E-4EF6-A6A5-95E2FB3EB1A1}" type="datetimeFigureOut">
               <a:rPr lang="en-GB" smtClean="0"/>
-              <a:t>12/01/2026</a:t>
+              <a:t>23/03/2026</a:t>
             </a:fld>
             <a:endParaRPr lang="en-GB"/>
           </a:p>
@@ -2843,7 +2375,7 @@
           <a:p>
             <a:fld id="{E85DF616-B21E-4EF6-A6A5-95E2FB3EB1A1}" type="datetimeFigureOut">
               <a:rPr lang="en-GB" smtClean="0"/>
-              <a:t>12/01/2026</a:t>
+              <a:t>23/03/2026</a:t>
             </a:fld>
             <a:endParaRPr lang="en-GB"/>
           </a:p>
@@ -2956,7 +2488,7 @@
           <a:p>
             <a:fld id="{E85DF616-B21E-4EF6-A6A5-95E2FB3EB1A1}" type="datetimeFigureOut">
               <a:rPr lang="en-GB" smtClean="0"/>
-              <a:t>12/01/2026</a:t>
+              <a:t>23/03/2026</a:t>
             </a:fld>
             <a:endParaRPr lang="en-GB"/>
           </a:p>
@@ -3269,7 +2801,7 @@
           <a:p>
             <a:fld id="{E85DF616-B21E-4EF6-A6A5-95E2FB3EB1A1}" type="datetimeFigureOut">
               <a:rPr lang="en-GB" smtClean="0"/>
-              <a:t>12/01/2026</a:t>
+              <a:t>23/03/2026</a:t>
             </a:fld>
             <a:endParaRPr lang="en-GB"/>
           </a:p>
@@ -3558,7 +3090,7 @@
           <a:p>
             <a:fld id="{E85DF616-B21E-4EF6-A6A5-95E2FB3EB1A1}" type="datetimeFigureOut">
               <a:rPr lang="en-GB" smtClean="0"/>
-              <a:t>12/01/2026</a:t>
+              <a:t>23/03/2026</a:t>
             </a:fld>
             <a:endParaRPr lang="en-GB"/>
           </a:p>
@@ -3801,7 +3333,7 @@
           <a:p>
             <a:fld id="{E85DF616-B21E-4EF6-A6A5-95E2FB3EB1A1}" type="datetimeFigureOut">
               <a:rPr lang="en-GB" smtClean="0"/>
-              <a:t>12/01/2026</a:t>
+              <a:t>23/03/2026</a:t>
             </a:fld>
             <a:endParaRPr lang="en-GB"/>
           </a:p>
@@ -4501,7 +4033,7 @@
         <p:spPr/>
         <p:txBody>
           <a:bodyPr>
-            <a:normAutofit/>
+            <a:normAutofit lnSpcReduction="10000"/>
           </a:bodyPr>
           <a:lstStyle/>
           <a:p>
@@ -4521,6 +4053,22 @@
             <a:r>
               <a:rPr lang="en-GB" dirty="0"/>
               <a:t>No need to submit the notebooks along with your report, as long as the requested code snippets are shown in your report.</a:t>
+            </a:r>
+          </a:p>
+          <a:p>
+            <a:r>
+              <a:rPr lang="en-GB" dirty="0"/>
+              <a:t>Submit via email at </a:t>
+            </a:r>
+            <a:r>
+              <a:rPr lang="en-GB" dirty="0">
+                <a:hlinkClick r:id="rId2"/>
+              </a:rPr>
+              <a:t>matthieu_demari@sutd.edu.sg</a:t>
+            </a:r>
+            <a:r>
+              <a:rPr lang="en-GB" dirty="0"/>
+              <a:t> </a:t>
             </a:r>
           </a:p>
           <a:p>
@@ -4542,7 +4090,23 @@
                   <a:srgbClr val="C00000"/>
                 </a:solidFill>
               </a:rPr>
-              <a:t>Deadline: XXXX</a:t>
+              <a:t>Deadline: 29</a:t>
+            </a:r>
+            <a:r>
+              <a:rPr lang="en-GB" b="1" baseline="30000" dirty="0">
+                <a:solidFill>
+                  <a:srgbClr val="C00000"/>
+                </a:solidFill>
+              </a:rPr>
+              <a:t>th</a:t>
+            </a:r>
+            <a:r>
+              <a:rPr lang="en-GB" b="1" dirty="0">
+                <a:solidFill>
+                  <a:srgbClr val="C00000"/>
+                </a:solidFill>
+              </a:rPr>
+              <a:t> March 2026, 11.59pm</a:t>
             </a:r>
           </a:p>
         </p:txBody>

--- a/Day 2 Part 4/D2P4.pptx
+++ b/Day 2 Part 4/D2P4.pptx
@@ -128,31 +128,23 @@
 </p:presentation>
 </file>
 
-<file path=ppt/revisionInfo.xml><?xml version="1.0" encoding="utf-8"?>
-<p1510:revInfo xmlns:a="http://schemas.openxmlformats.org/drawingml/2006/main" xmlns:r="http://schemas.openxmlformats.org/officeDocument/2006/relationships" xmlns:p1510="http://schemas.microsoft.com/office/powerpoint/2015/10/main">
-  <p1510:revLst>
-    <p1510:client id="{AA9B6F2A-77E8-4275-9BD1-FC5DABBD9771}" v="1" dt="2026-03-23T13:11:00.060"/>
-  </p1510:revLst>
-</p1510:revInfo>
-</file>
-
 <file path=ppt/changesInfos/changesInfo1.xml><?xml version="1.0" encoding="utf-8"?>
 <pc:chgInfo xmlns:a="http://schemas.openxmlformats.org/drawingml/2006/main" xmlns:r="http://schemas.openxmlformats.org/officeDocument/2006/relationships" xmlns:ac="http://schemas.microsoft.com/office/drawing/2013/main/command" xmlns:pc="http://schemas.microsoft.com/office/powerpoint/2013/main/command">
   <pc:docChgLst>
     <pc:chgData name="Matthieu De Mari" userId="dfb708c9-d8dc-439f-9a3b-c772bf4a311c" providerId="ADAL" clId="{81E9B007-0C2C-493E-9B93-55A62C9C1F12}"/>
     <pc:docChg chg="undo custSel addSld delSld modSld sldOrd delSection modSection">
-      <pc:chgData name="Matthieu De Mari" userId="dfb708c9-d8dc-439f-9a3b-c772bf4a311c" providerId="ADAL" clId="{81E9B007-0C2C-493E-9B93-55A62C9C1F12}" dt="2026-03-23T13:11:00.030" v="683" actId="20577"/>
+      <pc:chgData name="Matthieu De Mari" userId="dfb708c9-d8dc-439f-9a3b-c772bf4a311c" providerId="ADAL" clId="{81E9B007-0C2C-493E-9B93-55A62C9C1F12}" dt="2026-03-27T06:37:32.884" v="702" actId="20577"/>
       <pc:docMkLst>
         <pc:docMk/>
       </pc:docMkLst>
       <pc:sldChg chg="modSp add mod modClrScheme chgLayout">
-        <pc:chgData name="Matthieu De Mari" userId="dfb708c9-d8dc-439f-9a3b-c772bf4a311c" providerId="ADAL" clId="{81E9B007-0C2C-493E-9B93-55A62C9C1F12}" dt="2026-03-23T13:11:00.030" v="683" actId="20577"/>
+        <pc:chgData name="Matthieu De Mari" userId="dfb708c9-d8dc-439f-9a3b-c772bf4a311c" providerId="ADAL" clId="{81E9B007-0C2C-493E-9B93-55A62C9C1F12}" dt="2026-03-27T06:37:32.884" v="702" actId="20577"/>
         <pc:sldMkLst>
           <pc:docMk/>
           <pc:sldMk cId="2100063369" sldId="598"/>
         </pc:sldMkLst>
         <pc:spChg chg="mod ord">
-          <ac:chgData name="Matthieu De Mari" userId="dfb708c9-d8dc-439f-9a3b-c772bf4a311c" providerId="ADAL" clId="{81E9B007-0C2C-493E-9B93-55A62C9C1F12}" dt="2026-03-23T13:11:00.030" v="683" actId="20577"/>
+          <ac:chgData name="Matthieu De Mari" userId="dfb708c9-d8dc-439f-9a3b-c772bf4a311c" providerId="ADAL" clId="{81E9B007-0C2C-493E-9B93-55A62C9C1F12}" dt="2026-03-27T06:37:32.884" v="702" actId="20577"/>
           <ac:spMkLst>
             <pc:docMk/>
             <pc:sldMk cId="2100063369" sldId="598"/>
@@ -247,7 +239,7 @@
           <a:p>
             <a:fld id="{61478373-EB31-4867-8CF0-FA31364748A5}" type="datetimeFigureOut">
               <a:rPr lang="en-GB" smtClean="0"/>
-              <a:t>23/03/2026</a:t>
+              <a:t>27/03/2026</a:t>
             </a:fld>
             <a:endParaRPr lang="en-GB"/>
           </a:p>
@@ -664,7 +656,7 @@
           <a:p>
             <a:fld id="{E85DF616-B21E-4EF6-A6A5-95E2FB3EB1A1}" type="datetimeFigureOut">
               <a:rPr lang="en-GB" smtClean="0"/>
-              <a:t>23/03/2026</a:t>
+              <a:t>27/03/2026</a:t>
             </a:fld>
             <a:endParaRPr lang="en-GB"/>
           </a:p>
@@ -864,7 +856,7 @@
           <a:p>
             <a:fld id="{E85DF616-B21E-4EF6-A6A5-95E2FB3EB1A1}" type="datetimeFigureOut">
               <a:rPr lang="en-GB" smtClean="0"/>
-              <a:t>23/03/2026</a:t>
+              <a:t>27/03/2026</a:t>
             </a:fld>
             <a:endParaRPr lang="en-GB"/>
           </a:p>
@@ -1074,7 +1066,7 @@
           <a:p>
             <a:fld id="{E85DF616-B21E-4EF6-A6A5-95E2FB3EB1A1}" type="datetimeFigureOut">
               <a:rPr lang="en-GB" smtClean="0"/>
-              <a:t>23/03/2026</a:t>
+              <a:t>27/03/2026</a:t>
             </a:fld>
             <a:endParaRPr lang="en-GB"/>
           </a:p>
@@ -1274,7 +1266,7 @@
           <a:p>
             <a:fld id="{E85DF616-B21E-4EF6-A6A5-95E2FB3EB1A1}" type="datetimeFigureOut">
               <a:rPr lang="en-GB" smtClean="0"/>
-              <a:t>23/03/2026</a:t>
+              <a:t>27/03/2026</a:t>
             </a:fld>
             <a:endParaRPr lang="en-GB"/>
           </a:p>
@@ -1550,7 +1542,7 @@
           <a:p>
             <a:fld id="{E85DF616-B21E-4EF6-A6A5-95E2FB3EB1A1}" type="datetimeFigureOut">
               <a:rPr lang="en-GB" smtClean="0"/>
-              <a:t>23/03/2026</a:t>
+              <a:t>27/03/2026</a:t>
             </a:fld>
             <a:endParaRPr lang="en-GB"/>
           </a:p>
@@ -1818,7 +1810,7 @@
           <a:p>
             <a:fld id="{E85DF616-B21E-4EF6-A6A5-95E2FB3EB1A1}" type="datetimeFigureOut">
               <a:rPr lang="en-GB" smtClean="0"/>
-              <a:t>23/03/2026</a:t>
+              <a:t>27/03/2026</a:t>
             </a:fld>
             <a:endParaRPr lang="en-GB"/>
           </a:p>
@@ -2233,7 +2225,7 @@
           <a:p>
             <a:fld id="{E85DF616-B21E-4EF6-A6A5-95E2FB3EB1A1}" type="datetimeFigureOut">
               <a:rPr lang="en-GB" smtClean="0"/>
-              <a:t>23/03/2026</a:t>
+              <a:t>27/03/2026</a:t>
             </a:fld>
             <a:endParaRPr lang="en-GB"/>
           </a:p>
@@ -2375,7 +2367,7 @@
           <a:p>
             <a:fld id="{E85DF616-B21E-4EF6-A6A5-95E2FB3EB1A1}" type="datetimeFigureOut">
               <a:rPr lang="en-GB" smtClean="0"/>
-              <a:t>23/03/2026</a:t>
+              <a:t>27/03/2026</a:t>
             </a:fld>
             <a:endParaRPr lang="en-GB"/>
           </a:p>
@@ -2488,7 +2480,7 @@
           <a:p>
             <a:fld id="{E85DF616-B21E-4EF6-A6A5-95E2FB3EB1A1}" type="datetimeFigureOut">
               <a:rPr lang="en-GB" smtClean="0"/>
-              <a:t>23/03/2026</a:t>
+              <a:t>27/03/2026</a:t>
             </a:fld>
             <a:endParaRPr lang="en-GB"/>
           </a:p>
@@ -2801,7 +2793,7 @@
           <a:p>
             <a:fld id="{E85DF616-B21E-4EF6-A6A5-95E2FB3EB1A1}" type="datetimeFigureOut">
               <a:rPr lang="en-GB" smtClean="0"/>
-              <a:t>23/03/2026</a:t>
+              <a:t>27/03/2026</a:t>
             </a:fld>
             <a:endParaRPr lang="en-GB"/>
           </a:p>
@@ -3090,7 +3082,7 @@
           <a:p>
             <a:fld id="{E85DF616-B21E-4EF6-A6A5-95E2FB3EB1A1}" type="datetimeFigureOut">
               <a:rPr lang="en-GB" smtClean="0"/>
-              <a:t>23/03/2026</a:t>
+              <a:t>27/03/2026</a:t>
             </a:fld>
             <a:endParaRPr lang="en-GB"/>
           </a:p>
@@ -3333,7 +3325,7 @@
           <a:p>
             <a:fld id="{E85DF616-B21E-4EF6-A6A5-95E2FB3EB1A1}" type="datetimeFigureOut">
               <a:rPr lang="en-GB" smtClean="0"/>
-              <a:t>23/03/2026</a:t>
+              <a:t>27/03/2026</a:t>
             </a:fld>
             <a:endParaRPr lang="en-GB"/>
           </a:p>
@@ -4090,15 +4082,15 @@
                   <a:srgbClr val="C00000"/>
                 </a:solidFill>
               </a:rPr>
-              <a:t>Deadline: 29</a:t>
-            </a:r>
-            <a:r>
-              <a:rPr lang="en-GB" b="1" baseline="30000" dirty="0">
+              <a:t>Deadline</a:t>
+            </a:r>
+            <a:r>
+              <a:rPr lang="en-GB" b="1">
                 <a:solidFill>
                   <a:srgbClr val="C00000"/>
                 </a:solidFill>
               </a:rPr>
-              <a:t>th</a:t>
+              <a:t>: April 1st </a:t>
             </a:r>
             <a:r>
               <a:rPr lang="en-GB" b="1" dirty="0">
@@ -4106,7 +4098,7 @@
                   <a:srgbClr val="C00000"/>
                 </a:solidFill>
               </a:rPr>
-              <a:t> March 2026, 11.59pm</a:t>
+              <a:t>2026, 11.59pm</a:t>
             </a:r>
           </a:p>
         </p:txBody>
